--- a/utils/Fondo de lienzo.pptx
+++ b/utils/Fondo de lienzo.pptx
@@ -5,10 +5,12 @@
     <p:sldMasterId id="2147483648" r:id="rId1"/>
   </p:sldMasterIdLst>
   <p:notesMasterIdLst>
-    <p:notesMasterId r:id="rId3"/>
+    <p:notesMasterId r:id="rId5"/>
   </p:notesMasterIdLst>
   <p:sldIdLst>
     <p:sldId id="256" r:id="rId2"/>
+    <p:sldId id="257" r:id="rId3"/>
+    <p:sldId id="258" r:id="rId4"/>
   </p:sldIdLst>
   <p:sldSz cx="12192000" cy="6858000"/>
   <p:notesSz cx="6858000" cy="9144000"/>
@@ -118,7 +120,7 @@
 <file path=ppt/revisionInfo.xml><?xml version="1.0" encoding="utf-8"?>
 <p1510:revInfo xmlns:a="http://schemas.openxmlformats.org/drawingml/2006/main" xmlns:r="http://schemas.openxmlformats.org/officeDocument/2006/relationships" xmlns:p1510="http://schemas.microsoft.com/office/powerpoint/2015/10/main">
   <p1510:revLst>
-    <p1510:client id="{4EF86DEF-8E6B-48B7-997A-F22D7C39C98A}" v="15" dt="2026-03-09T11:22:37.281"/>
+    <p1510:client id="{4EF86DEF-8E6B-48B7-997A-F22D7C39C98A}" v="24" dt="2026-03-11T16:07:06.664"/>
   </p1510:revLst>
 </p1510:revInfo>
 </file>
@@ -127,8 +129,8 @@
 <pc:chgInfo xmlns:a="http://schemas.openxmlformats.org/drawingml/2006/main" xmlns:r="http://schemas.openxmlformats.org/officeDocument/2006/relationships" xmlns:ac="http://schemas.microsoft.com/office/drawing/2013/main/command" xmlns:pc="http://schemas.microsoft.com/office/powerpoint/2013/main/command">
   <pc:docChgLst>
     <pc:chgData name="Gaston Longhino" userId="644c49ecab6d410e" providerId="LiveId" clId="{EEF8FFAD-D1F6-4C4F-8D82-A2C789D9AC41}"/>
-    <pc:docChg chg="undo redo custSel modSld">
-      <pc:chgData name="Gaston Longhino" userId="644c49ecab6d410e" providerId="LiveId" clId="{EEF8FFAD-D1F6-4C4F-8D82-A2C789D9AC41}" dt="2026-03-09T12:22:07.455" v="84" actId="14100"/>
+    <pc:docChg chg="undo redo custSel addSld delSld modSld">
+      <pc:chgData name="Gaston Longhino" userId="644c49ecab6d410e" providerId="LiveId" clId="{EEF8FFAD-D1F6-4C4F-8D82-A2C789D9AC41}" dt="2026-03-11T16:59:16.306" v="133" actId="478"/>
       <pc:docMkLst>
         <pc:docMk/>
       </pc:docMkLst>
@@ -170,14 +172,6 @@
             <ac:spMk id="5" creationId="{912FCFAF-EC7A-B2E6-F404-489A4614132A}"/>
           </ac:spMkLst>
         </pc:spChg>
-        <pc:spChg chg="del mod">
-          <ac:chgData name="Gaston Longhino" userId="644c49ecab6d410e" providerId="LiveId" clId="{EEF8FFAD-D1F6-4C4F-8D82-A2C789D9AC41}" dt="2026-03-08T10:36:06.883" v="49" actId="21"/>
-          <ac:spMkLst>
-            <pc:docMk/>
-            <pc:sldMk cId="520605060" sldId="256"/>
-            <ac:spMk id="6" creationId="{398476D1-1B64-960F-4BB6-AEB1F407B13C}"/>
-          </ac:spMkLst>
-        </pc:spChg>
         <pc:spChg chg="add mod">
           <ac:chgData name="Gaston Longhino" userId="644c49ecab6d410e" providerId="LiveId" clId="{EEF8FFAD-D1F6-4C4F-8D82-A2C789D9AC41}" dt="2026-03-09T11:23:15.891" v="76" actId="207"/>
           <ac:spMkLst>
@@ -194,46 +188,139 @@
             <ac:spMk id="7" creationId="{F59FE516-427D-B89B-F9B8-809AE63FBF5B}"/>
           </ac:spMkLst>
         </pc:spChg>
-        <pc:spChg chg="del mod">
-          <ac:chgData name="Gaston Longhino" userId="644c49ecab6d410e" providerId="LiveId" clId="{EEF8FFAD-D1F6-4C4F-8D82-A2C789D9AC41}" dt="2026-03-08T10:36:19.248" v="54" actId="21"/>
+      </pc:sldChg>
+      <pc:sldChg chg="addSp delSp modSp new add del mod setBg">
+        <pc:chgData name="Gaston Longhino" userId="644c49ecab6d410e" providerId="LiveId" clId="{EEF8FFAD-D1F6-4C4F-8D82-A2C789D9AC41}" dt="2026-03-11T16:58:51.196" v="128" actId="2696"/>
+        <pc:sldMkLst>
+          <pc:docMk/>
+          <pc:sldMk cId="4184379921" sldId="257"/>
+        </pc:sldMkLst>
+        <pc:spChg chg="del">
+          <ac:chgData name="Gaston Longhino" userId="644c49ecab6d410e" providerId="LiveId" clId="{EEF8FFAD-D1F6-4C4F-8D82-A2C789D9AC41}" dt="2026-03-11T16:00:46.863" v="88" actId="478"/>
           <ac:spMkLst>
             <pc:docMk/>
-            <pc:sldMk cId="520605060" sldId="256"/>
-            <ac:spMk id="10" creationId="{8B7DA604-B251-F568-FF46-871D69EEA454}"/>
-          </ac:spMkLst>
-        </pc:spChg>
-        <pc:spChg chg="del mod">
-          <ac:chgData name="Gaston Longhino" userId="644c49ecab6d410e" providerId="LiveId" clId="{EEF8FFAD-D1F6-4C4F-8D82-A2C789D9AC41}" dt="2026-03-08T10:36:10.724" v="50" actId="21"/>
-          <ac:spMkLst>
-            <pc:docMk/>
-            <pc:sldMk cId="520605060" sldId="256"/>
-            <ac:spMk id="11" creationId="{54EDC424-04D5-B0E1-7BCE-72E73C99A059}"/>
+            <pc:sldMk cId="4184379921" sldId="257"/>
+            <ac:spMk id="2" creationId="{5EE6E107-1376-9EC2-ED4B-D158A4386233}"/>
           </ac:spMkLst>
         </pc:spChg>
         <pc:spChg chg="del">
-          <ac:chgData name="Gaston Longhino" userId="644c49ecab6d410e" providerId="LiveId" clId="{EEF8FFAD-D1F6-4C4F-8D82-A2C789D9AC41}" dt="2026-03-08T10:36:12.482" v="51" actId="21"/>
+          <ac:chgData name="Gaston Longhino" userId="644c49ecab6d410e" providerId="LiveId" clId="{EEF8FFAD-D1F6-4C4F-8D82-A2C789D9AC41}" dt="2026-03-11T16:00:45.540" v="87" actId="478"/>
           <ac:spMkLst>
             <pc:docMk/>
-            <pc:sldMk cId="520605060" sldId="256"/>
-            <ac:spMk id="12" creationId="{25C109C0-753A-42C1-D223-C49FD0893727}"/>
+            <pc:sldMk cId="4184379921" sldId="257"/>
+            <ac:spMk id="3" creationId="{A6E84A9B-C9A1-2E19-CDFE-CC4D51C75D0A}"/>
+          </ac:spMkLst>
+        </pc:spChg>
+        <pc:spChg chg="add mod">
+          <ac:chgData name="Gaston Longhino" userId="644c49ecab6d410e" providerId="LiveId" clId="{EEF8FFAD-D1F6-4C4F-8D82-A2C789D9AC41}" dt="2026-03-11T16:00:31.396" v="86"/>
+          <ac:spMkLst>
+            <pc:docMk/>
+            <pc:sldMk cId="4184379921" sldId="257"/>
+            <ac:spMk id="4" creationId="{F40A250B-1EB1-0237-1E9B-37EC3C587896}"/>
+          </ac:spMkLst>
+        </pc:spChg>
+        <pc:spChg chg="add mod">
+          <ac:chgData name="Gaston Longhino" userId="644c49ecab6d410e" providerId="LiveId" clId="{EEF8FFAD-D1F6-4C4F-8D82-A2C789D9AC41}" dt="2026-03-11T16:06:49.547" v="117" actId="14100"/>
+          <ac:spMkLst>
+            <pc:docMk/>
+            <pc:sldMk cId="4184379921" sldId="257"/>
+            <ac:spMk id="5" creationId="{3FF3F48B-5722-2C7E-7300-94DE05C3486F}"/>
+          </ac:spMkLst>
+        </pc:spChg>
+        <pc:spChg chg="add del mod">
+          <ac:chgData name="Gaston Longhino" userId="644c49ecab6d410e" providerId="LiveId" clId="{EEF8FFAD-D1F6-4C4F-8D82-A2C789D9AC41}" dt="2026-03-11T16:06:43.944" v="116" actId="21"/>
+          <ac:spMkLst>
+            <pc:docMk/>
+            <pc:sldMk cId="4184379921" sldId="257"/>
+            <ac:spMk id="6" creationId="{E5FEE1D4-95A5-28C9-B7BA-7B9716BABDC5}"/>
+          </ac:spMkLst>
+        </pc:spChg>
+        <pc:spChg chg="add mod">
+          <ac:chgData name="Gaston Longhino" userId="644c49ecab6d410e" providerId="LiveId" clId="{EEF8FFAD-D1F6-4C4F-8D82-A2C789D9AC41}" dt="2026-03-11T16:06:56.106" v="119" actId="14100"/>
+          <ac:spMkLst>
+            <pc:docMk/>
+            <pc:sldMk cId="4184379921" sldId="257"/>
+            <ac:spMk id="7" creationId="{09A81695-0986-0C2B-6149-C13C1C713E89}"/>
+          </ac:spMkLst>
+        </pc:spChg>
+        <pc:spChg chg="add del mod">
+          <ac:chgData name="Gaston Longhino" userId="644c49ecab6d410e" providerId="LiveId" clId="{EEF8FFAD-D1F6-4C4F-8D82-A2C789D9AC41}" dt="2026-03-11T16:01:52.679" v="108" actId="21"/>
+          <ac:spMkLst>
+            <pc:docMk/>
+            <pc:sldMk cId="4184379921" sldId="257"/>
+            <ac:spMk id="8" creationId="{3101453C-7DDF-1A9D-EB2C-58D1A7E6011B}"/>
+          </ac:spMkLst>
+        </pc:spChg>
+        <pc:spChg chg="add del mod">
+          <ac:chgData name="Gaston Longhino" userId="644c49ecab6d410e" providerId="LiveId" clId="{EEF8FFAD-D1F6-4C4F-8D82-A2C789D9AC41}" dt="2026-03-11T16:07:00.134" v="121" actId="21"/>
+          <ac:spMkLst>
+            <pc:docMk/>
+            <pc:sldMk cId="4184379921" sldId="257"/>
+            <ac:spMk id="9" creationId="{6DFDABCD-E7E5-ADAB-5587-4FC63750CDBA}"/>
+          </ac:spMkLst>
+        </pc:spChg>
+        <pc:spChg chg="add mod">
+          <ac:chgData name="Gaston Longhino" userId="644c49ecab6d410e" providerId="LiveId" clId="{EEF8FFAD-D1F6-4C4F-8D82-A2C789D9AC41}" dt="2026-03-11T16:07:04.301" v="122" actId="1076"/>
+          <ac:spMkLst>
+            <pc:docMk/>
+            <pc:sldMk cId="4184379921" sldId="257"/>
+            <ac:spMk id="10" creationId="{A07379CF-1B2D-9BD5-C356-DDCC820111FC}"/>
+          </ac:spMkLst>
+        </pc:spChg>
+        <pc:spChg chg="add mod">
+          <ac:chgData name="Gaston Longhino" userId="644c49ecab6d410e" providerId="LiveId" clId="{EEF8FFAD-D1F6-4C4F-8D82-A2C789D9AC41}" dt="2026-03-11T16:07:09.022" v="124" actId="1076"/>
+          <ac:spMkLst>
+            <pc:docMk/>
+            <pc:sldMk cId="4184379921" sldId="257"/>
+            <ac:spMk id="11" creationId="{84FB0BA2-51FA-9FB8-82DA-38C10A09607A}"/>
+          </ac:spMkLst>
+        </pc:spChg>
+      </pc:sldChg>
+      <pc:sldChg chg="delSp add mod">
+        <pc:chgData name="Gaston Longhino" userId="644c49ecab6d410e" providerId="LiveId" clId="{EEF8FFAD-D1F6-4C4F-8D82-A2C789D9AC41}" dt="2026-03-11T16:59:16.306" v="133" actId="478"/>
+        <pc:sldMkLst>
+          <pc:docMk/>
+          <pc:sldMk cId="2314784449" sldId="258"/>
+        </pc:sldMkLst>
+        <pc:spChg chg="del">
+          <ac:chgData name="Gaston Longhino" userId="644c49ecab6d410e" providerId="LiveId" clId="{EEF8FFAD-D1F6-4C4F-8D82-A2C789D9AC41}" dt="2026-03-11T16:59:11.071" v="130" actId="478"/>
+          <ac:spMkLst>
+            <pc:docMk/>
+            <pc:sldMk cId="2314784449" sldId="258"/>
+            <ac:spMk id="5" creationId="{92EBF897-C1EA-C10D-8EEB-7D5D0206388C}"/>
           </ac:spMkLst>
         </pc:spChg>
         <pc:spChg chg="del">
-          <ac:chgData name="Gaston Longhino" userId="644c49ecab6d410e" providerId="LiveId" clId="{EEF8FFAD-D1F6-4C4F-8D82-A2C789D9AC41}" dt="2026-03-08T10:36:16.779" v="53" actId="21"/>
+          <ac:chgData name="Gaston Longhino" userId="644c49ecab6d410e" providerId="LiveId" clId="{EEF8FFAD-D1F6-4C4F-8D82-A2C789D9AC41}" dt="2026-03-11T16:59:16.306" v="133" actId="478"/>
           <ac:spMkLst>
             <pc:docMk/>
-            <pc:sldMk cId="520605060" sldId="256"/>
-            <ac:spMk id="13" creationId="{3D9F3043-789C-7855-A6AC-8A1AED12B061}"/>
+            <pc:sldMk cId="2314784449" sldId="258"/>
+            <ac:spMk id="7" creationId="{77BB470E-33EA-2011-F19F-171853D3327D}"/>
           </ac:spMkLst>
         </pc:spChg>
         <pc:spChg chg="del">
-          <ac:chgData name="Gaston Longhino" userId="644c49ecab6d410e" providerId="LiveId" clId="{EEF8FFAD-D1F6-4C4F-8D82-A2C789D9AC41}" dt="2026-03-08T10:36:14.447" v="52" actId="21"/>
+          <ac:chgData name="Gaston Longhino" userId="644c49ecab6d410e" providerId="LiveId" clId="{EEF8FFAD-D1F6-4C4F-8D82-A2C789D9AC41}" dt="2026-03-11T16:59:14.478" v="132" actId="478"/>
           <ac:spMkLst>
             <pc:docMk/>
-            <pc:sldMk cId="520605060" sldId="256"/>
-            <ac:spMk id="14" creationId="{55BD0C80-10E9-B3AD-2B42-9C1323B1BD45}"/>
+            <pc:sldMk cId="2314784449" sldId="258"/>
+            <ac:spMk id="10" creationId="{38FA3E77-DAFD-21E0-4774-D63CD54F26A4}"/>
           </ac:spMkLst>
         </pc:spChg>
+        <pc:spChg chg="del">
+          <ac:chgData name="Gaston Longhino" userId="644c49ecab6d410e" providerId="LiveId" clId="{EEF8FFAD-D1F6-4C4F-8D82-A2C789D9AC41}" dt="2026-03-11T16:59:12.841" v="131" actId="478"/>
+          <ac:spMkLst>
+            <pc:docMk/>
+            <pc:sldMk cId="2314784449" sldId="258"/>
+            <ac:spMk id="11" creationId="{2747AF06-FE23-5595-C097-1469549A77F6}"/>
+          </ac:spMkLst>
+        </pc:spChg>
+      </pc:sldChg>
+      <pc:sldChg chg="new del">
+        <pc:chgData name="Gaston Longhino" userId="644c49ecab6d410e" providerId="LiveId" clId="{EEF8FFAD-D1F6-4C4F-8D82-A2C789D9AC41}" dt="2026-03-11T16:58:39.236" v="126" actId="680"/>
+        <pc:sldMkLst>
+          <pc:docMk/>
+          <pc:sldMk cId="2838780701" sldId="258"/>
+        </pc:sldMkLst>
       </pc:sldChg>
     </pc:docChg>
   </pc:docChgLst>
@@ -322,7 +409,7 @@
           <a:p>
             <a:fld id="{3B54C67B-BE99-433E-BB41-BEE28D6F38F9}" type="datetimeFigureOut">
               <a:rPr lang="es-AR" smtClean="0"/>
-              <a:t>9/3/2026</a:t>
+              <a:t>11/3/2026</a:t>
             </a:fld>
             <a:endParaRPr lang="es-AR"/>
           </a:p>
@@ -823,7 +910,7 @@
           <a:p>
             <a:fld id="{255D0B70-8044-458B-9291-E947BB2FA3EF}" type="datetimeFigureOut">
               <a:rPr lang="es-AR" smtClean="0"/>
-              <a:t>9/3/2026</a:t>
+              <a:t>11/3/2026</a:t>
             </a:fld>
             <a:endParaRPr lang="es-AR"/>
           </a:p>
@@ -1023,7 +1110,7 @@
           <a:p>
             <a:fld id="{255D0B70-8044-458B-9291-E947BB2FA3EF}" type="datetimeFigureOut">
               <a:rPr lang="es-AR" smtClean="0"/>
-              <a:t>9/3/2026</a:t>
+              <a:t>11/3/2026</a:t>
             </a:fld>
             <a:endParaRPr lang="es-AR"/>
           </a:p>
@@ -1233,7 +1320,7 @@
           <a:p>
             <a:fld id="{255D0B70-8044-458B-9291-E947BB2FA3EF}" type="datetimeFigureOut">
               <a:rPr lang="es-AR" smtClean="0"/>
-              <a:t>9/3/2026</a:t>
+              <a:t>11/3/2026</a:t>
             </a:fld>
             <a:endParaRPr lang="es-AR"/>
           </a:p>
@@ -1433,7 +1520,7 @@
           <a:p>
             <a:fld id="{255D0B70-8044-458B-9291-E947BB2FA3EF}" type="datetimeFigureOut">
               <a:rPr lang="es-AR" smtClean="0"/>
-              <a:t>9/3/2026</a:t>
+              <a:t>11/3/2026</a:t>
             </a:fld>
             <a:endParaRPr lang="es-AR"/>
           </a:p>
@@ -1709,7 +1796,7 @@
           <a:p>
             <a:fld id="{255D0B70-8044-458B-9291-E947BB2FA3EF}" type="datetimeFigureOut">
               <a:rPr lang="es-AR" smtClean="0"/>
-              <a:t>9/3/2026</a:t>
+              <a:t>11/3/2026</a:t>
             </a:fld>
             <a:endParaRPr lang="es-AR"/>
           </a:p>
@@ -1977,7 +2064,7 @@
           <a:p>
             <a:fld id="{255D0B70-8044-458B-9291-E947BB2FA3EF}" type="datetimeFigureOut">
               <a:rPr lang="es-AR" smtClean="0"/>
-              <a:t>9/3/2026</a:t>
+              <a:t>11/3/2026</a:t>
             </a:fld>
             <a:endParaRPr lang="es-AR"/>
           </a:p>
@@ -2392,7 +2479,7 @@
           <a:p>
             <a:fld id="{255D0B70-8044-458B-9291-E947BB2FA3EF}" type="datetimeFigureOut">
               <a:rPr lang="es-AR" smtClean="0"/>
-              <a:t>9/3/2026</a:t>
+              <a:t>11/3/2026</a:t>
             </a:fld>
             <a:endParaRPr lang="es-AR"/>
           </a:p>
@@ -2534,7 +2621,7 @@
           <a:p>
             <a:fld id="{255D0B70-8044-458B-9291-E947BB2FA3EF}" type="datetimeFigureOut">
               <a:rPr lang="es-AR" smtClean="0"/>
-              <a:t>9/3/2026</a:t>
+              <a:t>11/3/2026</a:t>
             </a:fld>
             <a:endParaRPr lang="es-AR"/>
           </a:p>
@@ -2647,7 +2734,7 @@
           <a:p>
             <a:fld id="{255D0B70-8044-458B-9291-E947BB2FA3EF}" type="datetimeFigureOut">
               <a:rPr lang="es-AR" smtClean="0"/>
-              <a:t>9/3/2026</a:t>
+              <a:t>11/3/2026</a:t>
             </a:fld>
             <a:endParaRPr lang="es-AR"/>
           </a:p>
@@ -2960,7 +3047,7 @@
           <a:p>
             <a:fld id="{255D0B70-8044-458B-9291-E947BB2FA3EF}" type="datetimeFigureOut">
               <a:rPr lang="es-AR" smtClean="0"/>
-              <a:t>9/3/2026</a:t>
+              <a:t>11/3/2026</a:t>
             </a:fld>
             <a:endParaRPr lang="es-AR"/>
           </a:p>
@@ -3249,7 +3336,7 @@
           <a:p>
             <a:fld id="{255D0B70-8044-458B-9291-E947BB2FA3EF}" type="datetimeFigureOut">
               <a:rPr lang="es-AR" smtClean="0"/>
-              <a:t>9/3/2026</a:t>
+              <a:t>11/3/2026</a:t>
             </a:fld>
             <a:endParaRPr lang="es-AR"/>
           </a:p>
@@ -3492,7 +3579,7 @@
           <a:p>
             <a:fld id="{255D0B70-8044-458B-9291-E947BB2FA3EF}" type="datetimeFigureOut">
               <a:rPr lang="es-AR" smtClean="0"/>
-              <a:t>9/3/2026</a:t>
+              <a:t>11/3/2026</a:t>
             </a:fld>
             <a:endParaRPr lang="es-AR"/>
           </a:p>
@@ -4218,6 +4305,388 @@
     <p:extLst>
       <p:ext uri="{BB962C8B-B14F-4D97-AF65-F5344CB8AC3E}">
         <p14:creationId xmlns:p14="http://schemas.microsoft.com/office/powerpoint/2010/main" val="520605060"/>
+      </p:ext>
+    </p:extLst>
+  </p:cSld>
+  <p:clrMapOvr>
+    <a:masterClrMapping/>
+  </p:clrMapOvr>
+</p:sld>
+</file>
+
+<file path=ppt/slides/slide2.xml><?xml version="1.0" encoding="utf-8"?>
+<p:sld xmlns:a="http://schemas.openxmlformats.org/drawingml/2006/main" xmlns:r="http://schemas.openxmlformats.org/officeDocument/2006/relationships" xmlns:p="http://schemas.openxmlformats.org/presentationml/2006/main">
+  <p:cSld>
+    <p:bg>
+      <p:bgPr>
+        <a:solidFill>
+          <a:srgbClr val="0F172A"/>
+        </a:solidFill>
+        <a:effectLst/>
+      </p:bgPr>
+    </p:bg>
+    <p:spTree>
+      <p:nvGrpSpPr>
+        <p:cNvPr id="1" name=""/>
+        <p:cNvGrpSpPr/>
+        <p:nvPr/>
+      </p:nvGrpSpPr>
+      <p:grpSpPr>
+        <a:xfrm>
+          <a:off x="0" y="0"/>
+          <a:ext cx="0" cy="0"/>
+          <a:chOff x="0" y="0"/>
+          <a:chExt cx="0" cy="0"/>
+        </a:xfrm>
+      </p:grpSpPr>
+      <p:sp>
+        <p:nvSpPr>
+          <p:cNvPr id="4" name="Rectángulo 3">
+            <a:extLst>
+              <a:ext uri="{FF2B5EF4-FFF2-40B4-BE49-F238E27FC236}">
+                <a16:creationId xmlns:a16="http://schemas.microsoft.com/office/drawing/2014/main" id="{F40A250B-1EB1-0237-1E9B-37EC3C587896}"/>
+              </a:ext>
+            </a:extLst>
+          </p:cNvPr>
+          <p:cNvSpPr/>
+          <p:nvPr/>
+        </p:nvSpPr>
+        <p:spPr>
+          <a:xfrm>
+            <a:off x="0" y="0"/>
+            <a:ext cx="1546502" cy="6858000"/>
+          </a:xfrm>
+          <a:prstGeom prst="rect">
+            <a:avLst/>
+          </a:prstGeom>
+          <a:solidFill>
+            <a:srgbClr val="1E293B"/>
+          </a:solidFill>
+          <a:ln>
+            <a:noFill/>
+          </a:ln>
+        </p:spPr>
+        <p:style>
+          <a:lnRef idx="2">
+            <a:schemeClr val="accent1">
+              <a:shade val="15000"/>
+            </a:schemeClr>
+          </a:lnRef>
+          <a:fillRef idx="1">
+            <a:schemeClr val="accent1"/>
+          </a:fillRef>
+          <a:effectRef idx="0">
+            <a:schemeClr val="accent1"/>
+          </a:effectRef>
+          <a:fontRef idx="minor">
+            <a:schemeClr val="lt1"/>
+          </a:fontRef>
+        </p:style>
+        <p:txBody>
+          <a:bodyPr rtlCol="0" anchor="ctr"/>
+          <a:lstStyle/>
+          <a:p>
+            <a:pPr algn="ctr"/>
+            <a:endParaRPr lang="es-AR" dirty="0"/>
+          </a:p>
+        </p:txBody>
+      </p:sp>
+      <p:sp>
+        <p:nvSpPr>
+          <p:cNvPr id="5" name="Rectángulo: esquinas redondeadas 4">
+            <a:extLst>
+              <a:ext uri="{FF2B5EF4-FFF2-40B4-BE49-F238E27FC236}">
+                <a16:creationId xmlns:a16="http://schemas.microsoft.com/office/drawing/2014/main" id="{3FF3F48B-5722-2C7E-7300-94DE05C3486F}"/>
+              </a:ext>
+            </a:extLst>
+          </p:cNvPr>
+          <p:cNvSpPr/>
+          <p:nvPr/>
+        </p:nvSpPr>
+        <p:spPr>
+          <a:xfrm>
+            <a:off x="1928813" y="1300162"/>
+            <a:ext cx="3743325" cy="2393157"/>
+          </a:xfrm>
+          <a:prstGeom prst="roundRect">
+            <a:avLst/>
+          </a:prstGeom>
+          <a:solidFill>
+            <a:srgbClr val="1E293B"/>
+          </a:solidFill>
+        </p:spPr>
+        <p:style>
+          <a:lnRef idx="2">
+            <a:schemeClr val="accent1">
+              <a:shade val="15000"/>
+            </a:schemeClr>
+          </a:lnRef>
+          <a:fillRef idx="1">
+            <a:schemeClr val="accent1"/>
+          </a:fillRef>
+          <a:effectRef idx="0">
+            <a:schemeClr val="accent1"/>
+          </a:effectRef>
+          <a:fontRef idx="minor">
+            <a:schemeClr val="lt1"/>
+          </a:fontRef>
+        </p:style>
+        <p:txBody>
+          <a:bodyPr rtlCol="0" anchor="ctr"/>
+          <a:lstStyle/>
+          <a:p>
+            <a:pPr algn="ctr"/>
+            <a:endParaRPr lang="es-AR"/>
+          </a:p>
+        </p:txBody>
+      </p:sp>
+      <p:sp>
+        <p:nvSpPr>
+          <p:cNvPr id="7" name="Rectángulo: esquinas redondeadas 6">
+            <a:extLst>
+              <a:ext uri="{FF2B5EF4-FFF2-40B4-BE49-F238E27FC236}">
+                <a16:creationId xmlns:a16="http://schemas.microsoft.com/office/drawing/2014/main" id="{09A81695-0986-0C2B-6149-C13C1C713E89}"/>
+              </a:ext>
+            </a:extLst>
+          </p:cNvPr>
+          <p:cNvSpPr/>
+          <p:nvPr/>
+        </p:nvSpPr>
+        <p:spPr>
+          <a:xfrm>
+            <a:off x="6410326" y="1050131"/>
+            <a:ext cx="5319711" cy="2643188"/>
+          </a:xfrm>
+          <a:prstGeom prst="roundRect">
+            <a:avLst/>
+          </a:prstGeom>
+          <a:solidFill>
+            <a:srgbClr val="1E293B"/>
+          </a:solidFill>
+        </p:spPr>
+        <p:style>
+          <a:lnRef idx="2">
+            <a:schemeClr val="accent1">
+              <a:shade val="15000"/>
+            </a:schemeClr>
+          </a:lnRef>
+          <a:fillRef idx="1">
+            <a:schemeClr val="accent1"/>
+          </a:fillRef>
+          <a:effectRef idx="0">
+            <a:schemeClr val="accent1"/>
+          </a:effectRef>
+          <a:fontRef idx="minor">
+            <a:schemeClr val="lt1"/>
+          </a:fontRef>
+        </p:style>
+        <p:txBody>
+          <a:bodyPr rtlCol="0" anchor="ctr"/>
+          <a:lstStyle/>
+          <a:p>
+            <a:pPr algn="ctr"/>
+            <a:endParaRPr lang="es-AR"/>
+          </a:p>
+        </p:txBody>
+      </p:sp>
+      <p:sp>
+        <p:nvSpPr>
+          <p:cNvPr id="10" name="Rectángulo: esquinas redondeadas 9">
+            <a:extLst>
+              <a:ext uri="{FF2B5EF4-FFF2-40B4-BE49-F238E27FC236}">
+                <a16:creationId xmlns:a16="http://schemas.microsoft.com/office/drawing/2014/main" id="{A07379CF-1B2D-9BD5-C356-DDCC820111FC}"/>
+              </a:ext>
+            </a:extLst>
+          </p:cNvPr>
+          <p:cNvSpPr/>
+          <p:nvPr/>
+        </p:nvSpPr>
+        <p:spPr>
+          <a:xfrm>
+            <a:off x="6410326" y="3952874"/>
+            <a:ext cx="5319711" cy="2643188"/>
+          </a:xfrm>
+          <a:prstGeom prst="roundRect">
+            <a:avLst/>
+          </a:prstGeom>
+          <a:solidFill>
+            <a:srgbClr val="1E293B"/>
+          </a:solidFill>
+        </p:spPr>
+        <p:style>
+          <a:lnRef idx="2">
+            <a:schemeClr val="accent1">
+              <a:shade val="15000"/>
+            </a:schemeClr>
+          </a:lnRef>
+          <a:fillRef idx="1">
+            <a:schemeClr val="accent1"/>
+          </a:fillRef>
+          <a:effectRef idx="0">
+            <a:schemeClr val="accent1"/>
+          </a:effectRef>
+          <a:fontRef idx="minor">
+            <a:schemeClr val="lt1"/>
+          </a:fontRef>
+        </p:style>
+        <p:txBody>
+          <a:bodyPr rtlCol="0" anchor="ctr"/>
+          <a:lstStyle/>
+          <a:p>
+            <a:pPr algn="ctr"/>
+            <a:endParaRPr lang="es-AR"/>
+          </a:p>
+        </p:txBody>
+      </p:sp>
+      <p:sp>
+        <p:nvSpPr>
+          <p:cNvPr id="11" name="Rectángulo: esquinas redondeadas 10">
+            <a:extLst>
+              <a:ext uri="{FF2B5EF4-FFF2-40B4-BE49-F238E27FC236}">
+                <a16:creationId xmlns:a16="http://schemas.microsoft.com/office/drawing/2014/main" id="{84FB0BA2-51FA-9FB8-82DA-38C10A09607A}"/>
+              </a:ext>
+            </a:extLst>
+          </p:cNvPr>
+          <p:cNvSpPr/>
+          <p:nvPr/>
+        </p:nvSpPr>
+        <p:spPr>
+          <a:xfrm>
+            <a:off x="1928813" y="3952874"/>
+            <a:ext cx="3743325" cy="2393157"/>
+          </a:xfrm>
+          <a:prstGeom prst="roundRect">
+            <a:avLst/>
+          </a:prstGeom>
+          <a:solidFill>
+            <a:srgbClr val="1E293B"/>
+          </a:solidFill>
+        </p:spPr>
+        <p:style>
+          <a:lnRef idx="2">
+            <a:schemeClr val="accent1">
+              <a:shade val="15000"/>
+            </a:schemeClr>
+          </a:lnRef>
+          <a:fillRef idx="1">
+            <a:schemeClr val="accent1"/>
+          </a:fillRef>
+          <a:effectRef idx="0">
+            <a:schemeClr val="accent1"/>
+          </a:effectRef>
+          <a:fontRef idx="minor">
+            <a:schemeClr val="lt1"/>
+          </a:fontRef>
+        </p:style>
+        <p:txBody>
+          <a:bodyPr rtlCol="0" anchor="ctr"/>
+          <a:lstStyle/>
+          <a:p>
+            <a:pPr algn="ctr"/>
+            <a:endParaRPr lang="es-AR"/>
+          </a:p>
+        </p:txBody>
+      </p:sp>
+    </p:spTree>
+    <p:extLst>
+      <p:ext uri="{BB962C8B-B14F-4D97-AF65-F5344CB8AC3E}">
+        <p14:creationId xmlns:p14="http://schemas.microsoft.com/office/powerpoint/2010/main" val="4184379921"/>
+      </p:ext>
+    </p:extLst>
+  </p:cSld>
+  <p:clrMapOvr>
+    <a:masterClrMapping/>
+  </p:clrMapOvr>
+</p:sld>
+</file>
+
+<file path=ppt/slides/slide3.xml><?xml version="1.0" encoding="utf-8"?>
+<p:sld xmlns:a="http://schemas.openxmlformats.org/drawingml/2006/main" xmlns:r="http://schemas.openxmlformats.org/officeDocument/2006/relationships" xmlns:p="http://schemas.openxmlformats.org/presentationml/2006/main">
+  <p:cSld>
+    <p:bg>
+      <p:bgPr>
+        <a:solidFill>
+          <a:srgbClr val="0F172A"/>
+        </a:solidFill>
+        <a:effectLst/>
+      </p:bgPr>
+    </p:bg>
+    <p:spTree>
+      <p:nvGrpSpPr>
+        <p:cNvPr id="1" name="">
+          <a:extLst>
+            <a:ext uri="{FF2B5EF4-FFF2-40B4-BE49-F238E27FC236}">
+              <a16:creationId xmlns:a16="http://schemas.microsoft.com/office/drawing/2014/main" id="{EABFFA0F-21B7-0D2A-08F8-CFCEDBC81869}"/>
+            </a:ext>
+          </a:extLst>
+        </p:cNvPr>
+        <p:cNvGrpSpPr/>
+        <p:nvPr/>
+      </p:nvGrpSpPr>
+      <p:grpSpPr>
+        <a:xfrm>
+          <a:off x="0" y="0"/>
+          <a:ext cx="0" cy="0"/>
+          <a:chOff x="0" y="0"/>
+          <a:chExt cx="0" cy="0"/>
+        </a:xfrm>
+      </p:grpSpPr>
+      <p:sp>
+        <p:nvSpPr>
+          <p:cNvPr id="4" name="Rectángulo 3">
+            <a:extLst>
+              <a:ext uri="{FF2B5EF4-FFF2-40B4-BE49-F238E27FC236}">
+                <a16:creationId xmlns:a16="http://schemas.microsoft.com/office/drawing/2014/main" id="{7BE418CE-4756-CFF2-BFB3-C3A26EAC9636}"/>
+              </a:ext>
+            </a:extLst>
+          </p:cNvPr>
+          <p:cNvSpPr/>
+          <p:nvPr/>
+        </p:nvSpPr>
+        <p:spPr>
+          <a:xfrm>
+            <a:off x="0" y="0"/>
+            <a:ext cx="1546502" cy="6858000"/>
+          </a:xfrm>
+          <a:prstGeom prst="rect">
+            <a:avLst/>
+          </a:prstGeom>
+          <a:solidFill>
+            <a:srgbClr val="1E293B"/>
+          </a:solidFill>
+          <a:ln>
+            <a:noFill/>
+          </a:ln>
+        </p:spPr>
+        <p:style>
+          <a:lnRef idx="2">
+            <a:schemeClr val="accent1">
+              <a:shade val="15000"/>
+            </a:schemeClr>
+          </a:lnRef>
+          <a:fillRef idx="1">
+            <a:schemeClr val="accent1"/>
+          </a:fillRef>
+          <a:effectRef idx="0">
+            <a:schemeClr val="accent1"/>
+          </a:effectRef>
+          <a:fontRef idx="minor">
+            <a:schemeClr val="lt1"/>
+          </a:fontRef>
+        </p:style>
+        <p:txBody>
+          <a:bodyPr rtlCol="0" anchor="ctr"/>
+          <a:lstStyle/>
+          <a:p>
+            <a:pPr algn="ctr"/>
+            <a:endParaRPr lang="es-AR" dirty="0"/>
+          </a:p>
+        </p:txBody>
+      </p:sp>
+    </p:spTree>
+    <p:extLst>
+      <p:ext uri="{BB962C8B-B14F-4D97-AF65-F5344CB8AC3E}">
+        <p14:creationId xmlns:p14="http://schemas.microsoft.com/office/powerpoint/2010/main" val="2314784449"/>
       </p:ext>
     </p:extLst>
   </p:cSld>
